--- a/PARADISE_presentatie/PARADISE_board.pptx
+++ b/PARADISE_presentatie/PARADISE_board.pptx
@@ -56533,7 +56533,7 @@
                 </a:solidFill>
                 <a:latin typeface="Segoe UI"/>
               </a:rPr>
-              <a:t>Recidief én draagtijd, beide op 18 maanden</a:t>
+              <a:t>Recidief op 18 maanden, draagtijd op 12</a:t>
             </a:r>
           </a:p>
         </p:txBody>
@@ -63609,7 +63609,7 @@
         <p:spPr>
           <a:xfrm>
             <a:off x="952476" y="5549761"/>
-            <a:ext cx="10286742" cy="444488"/>
+            <a:ext cx="10286742" cy="380990"/>
           </a:xfrm>
           <a:prstGeom prst="rect">
             <a:avLst/>
@@ -64514,8 +64514,8 @@
         </p:nvSpPr>
         <p:spPr>
           <a:xfrm>
-            <a:off x="634984" y="5371965"/>
-            <a:ext cx="10921726" cy="736581"/>
+            <a:off x="634984" y="4992194"/>
+            <a:ext cx="10921726" cy="1116352"/>
           </a:xfrm>
           <a:prstGeom prst="roundRect">
             <a:avLst>
@@ -64562,8 +64562,8 @@
         </p:nvSpPr>
         <p:spPr>
           <a:xfrm>
-            <a:off x="952476" y="5549761"/>
-            <a:ext cx="10286742" cy="444488"/>
+            <a:off x="952476" y="5169989"/>
+            <a:ext cx="10286742" cy="760761"/>
           </a:xfrm>
           <a:prstGeom prst="rect">
             <a:avLst/>

--- a/PARADISE_presentatie/PARADISE_board.pptx
+++ b/PARADISE_presentatie/PARADISE_board.pptx
@@ -525,6 +525,17 @@
           <a:lstStyle/>
           <a:p>
             <a:r>
+              <a:t>WAT U ZEGT</a:t>
+            </a:r>
+          </a:p>
+          <a:p>
+            <a:r>
+              <a:t>PARADISE gaat niet over genezen maar over terugkomen. Zes Belgische voetklinieken, honderdvierenveertig patiënten, achttien maanden per patiënt. Ik neem u mee langs het waarom, de meting en het traject. Onderbreek me gerust.</a:t>
+            </a:r>
+          </a:p>
+          <a:p/>
+          <a:p>
+            <a:r>
               <a:t>PRESENTATIETIP</a:t>
             </a:r>
           </a:p>
@@ -611,6 +622,17 @@
           <a:lstStyle/>
           <a:p>
             <a:r>
+              <a:t>WAT U ZEGT</a:t>
+            </a:r>
+          </a:p>
+          <a:p>
+            <a:r>
+              <a:t>Belasting is een product, geen optelsom. Piekdruk maal activiteit maal draagtijd. Eén factor op nul maakt het hele product nul. Daarom heeft PARADISE twee normen en niet één.</a:t>
+            </a:r>
+          </a:p>
+          <a:p/>
+          <a:p>
+            <a:r>
               <a:t>PRESENTATIETIP</a:t>
             </a:r>
           </a:p>
@@ -697,6 +719,17 @@
           <a:lstStyle/>
           <a:p>
             <a:r>
+              <a:t>WAT U ZEGT</a:t>
+            </a:r>
+          </a:p>
+          <a:p>
+            <a:r>
+              <a:t>Blok twee: de meting. Wat u meet, hoe u het meet, en wanneer het goed genoeg is.</a:t>
+            </a:r>
+          </a:p>
+          <a:p/>
+          <a:p>
+            <a:r>
               <a:t>PRESENTATIETIP</a:t>
             </a:r>
           </a:p>
@@ -775,6 +808,17 @@
           <a:lstStyle/>
           <a:p>
             <a:r>
+              <a:t>WAT U ZEGT</a:t>
+            </a:r>
+          </a:p>
+          <a:p>
+            <a:r>
+              <a:t>Elke sensor geeft een cijfer. Dit is de baseline, blootsvoets: driehonderdtwaalf kilopascal onder metatarsaal twee-drie. Drie metingen per voet, waar de software één beeld van maakt. Hiertegen wordt alles afgezet.</a:t>
+            </a:r>
+          </a:p>
+          <a:p/>
+          <a:p>
+            <a:r>
               <a:t>PRESENTATIETIP</a:t>
             </a:r>
           </a:p>
@@ -861,6 +905,17 @@
           <a:lstStyle/>
           <a:p>
             <a:r>
+              <a:t>WAT U ZEGT</a:t>
+            </a:r>
+          </a:p>
+          <a:p>
+            <a:r>
+              <a:t>Zelfde voet, na aanpassing. Honderdzesentachtig kilopascal: veertig procent lager én onder de tweehonderd. De norm geldt per doelregio. Haalt u ze niet, dan past u aan en meet u opnieuw.</a:t>
+            </a:r>
+          </a:p>
+          <a:p/>
+          <a:p>
+            <a:r>
               <a:t>PRESENTATIETIP</a:t>
             </a:r>
           </a:p>
@@ -947,6 +1002,17 @@
           <a:lstStyle/>
           <a:p>
             <a:r>
+              <a:t>WAT U ZEGT</a:t>
+            </a:r>
+          </a:p>
+          <a:p>
+            <a:r>
+              <a:t>Even stilstaan. Het doel is niet minder belasting. Het doel is belasting op een plek die het aankan. Dat is de hele interventie.</a:t>
+            </a:r>
+          </a:p>
+          <a:p/>
+          <a:p>
+            <a:r>
               <a:t>PRESENTATIETIP</a:t>
             </a:r>
           </a:p>
@@ -1033,6 +1099,17 @@
           <a:lstStyle/>
           <a:p>
             <a:r>
+              <a:t>WAT U ZEGT</a:t>
+            </a:r>
+          </a:p>
+          <a:p>
+            <a:r>
+              <a:t>Blok drie: het traject. Negen contactmomenten. Per moment: wat u doet en wat u invult.</a:t>
+            </a:r>
+          </a:p>
+          <a:p/>
+          <a:p>
+            <a:r>
               <a:t>PRESENTATIETIP</a:t>
             </a:r>
           </a:p>
@@ -1111,6 +1188,17 @@
           <a:lstStyle/>
           <a:p>
             <a:r>
+              <a:t>WAT U ZEGT</a:t>
+            </a:r>
+          </a:p>
+          <a:p>
+            <a:r>
+              <a:t>Screening en negen visites over achttien maanden. De eerste drie liggen dicht op elkaar. Daarna is het ritme elke drie maanden — hetzelfde ritme als de controle die deze patiënten toch al krijgen.</a:t>
+            </a:r>
+          </a:p>
+          <a:p/>
+          <a:p>
+            <a:r>
               <a:t>PRESENTATIETIP</a:t>
             </a:r>
           </a:p>
@@ -1197,6 +1285,17 @@
           <a:lstStyle/>
           <a:p>
             <a:r>
+              <a:t>WAT U ZEGT</a:t>
+            </a:r>
+          </a:p>
+          <a:p>
+            <a:r>
+              <a:t>Tien contactmomenten, één zorgpad. Het verschil met vandaag zit niet in hoe vaak u de patiënt ziet, maar in wat u bij elk bezoek wéét: wat de zool doet, en wat er gedragen is.</a:t>
+            </a:r>
+          </a:p>
+          <a:p/>
+          <a:p>
+            <a:r>
               <a:t>PRESENTATIETIP</a:t>
             </a:r>
           </a:p>
@@ -1283,6 +1382,17 @@
           <a:lstStyle/>
           <a:p>
             <a:r>
+              <a:t>WAT U ZEGT</a:t>
+            </a:r>
+          </a:p>
+          <a:p>
+            <a:r>
+              <a:t>Blok vier: de toestellen en de regels. De instellingen, het gesprek, en de vier dingen die vastliggen.</a:t>
+            </a:r>
+          </a:p>
+          <a:p/>
+          <a:p>
+            <a:r>
               <a:t>PRESENTATIETIP</a:t>
             </a:r>
           </a:p>
@@ -1361,6 +1471,17 @@
           <a:lstStyle/>
           <a:p>
             <a:r>
+              <a:t>WAT U ZEGT</a:t>
+            </a:r>
+          </a:p>
+          <a:p>
+            <a:r>
+              <a:t>Drie toestellen, drie taken. De pedar meet druk, de Orthotimer meet of de zool gedragen is, de MoveMonitor meet hoeveel er gestapt wordt. Alleen de pedar bedient u bij elke meting; de andere twee plaatst u één keer en leest u uit.</a:t>
+            </a:r>
+          </a:p>
+          <a:p/>
+          <a:p>
+            <a:r>
               <a:t>PRESENTATIETIP</a:t>
             </a:r>
           </a:p>
@@ -1447,6 +1568,17 @@
           <a:lstStyle/>
           <a:p>
             <a:r>
+              <a:t>WAT U ZEGT</a:t>
+            </a:r>
+          </a:p>
+          <a:p>
+            <a:r>
+              <a:t>Elke stip is een patiënt. Vierentwintig daarvan komen uit úw kliniek, twaalf in elke arm. Zes keer vierentwintig is honderdvierenveertig. Blijft één centrum achter, dan haalt de studie het niet.</a:t>
+            </a:r>
+          </a:p>
+          <a:p/>
+          <a:p>
+            <a:r>
               <a:t>PRESENTATIETIP</a:t>
             </a:r>
           </a:p>
@@ -1533,6 +1665,17 @@
           <a:lstStyle/>
           <a:p>
             <a:r>
+              <a:t>WAT U ZEGT</a:t>
+            </a:r>
+          </a:p>
+          <a:p>
+            <a:r>
+              <a:t>Zo klein is de sensor: negen bij dertien millimeter. Hij zit in de zool, meet alleen temperatuur, en de patiënt merkt er niets van. Noem hem tegenover de patiënt gewoon "uw sensor".</a:t>
+            </a:r>
+          </a:p>
+          <a:p/>
+          <a:p>
+            <a:r>
               <a:t>PRESENTATIETIP</a:t>
             </a:r>
           </a:p>
@@ -1619,6 +1762,17 @@
           <a:lstStyle/>
           <a:p>
             <a:r>
+              <a:t>WAT U ZEGT</a:t>
+            </a:r>
+          </a:p>
+          <a:p>
+            <a:r>
+              <a:t>Vier rollen. De podoloog meet, leest uit en begeleidt. De pedorthist maakt en past aan. De arts bevestigt geschiktheid en beoordeelt laesies. Het management houdt tijd vrij en bewaakt de vierentwintig.</a:t>
+            </a:r>
+          </a:p>
+          <a:p/>
+          <a:p>
+            <a:r>
               <a:t>PRESENTATIETIP</a:t>
             </a:r>
           </a:p>
@@ -1705,6 +1859,17 @@
           <a:lstStyle/>
           <a:p>
             <a:r>
+              <a:t>WAT U ZEGT</a:t>
+            </a:r>
+          </a:p>
+          <a:p>
+            <a:r>
+              <a:t>En dit krijgt u van ons. Training in motiverende gespreksvoering, SOP's per handeling, één contactpunt, en het onderzoeksteam voert de gegevens in. Nul sancties: wijkt u af, dan meldt u het, en dat wordt geregistreerd, niet afgestraft.</a:t>
+            </a:r>
+          </a:p>
+          <a:p/>
+          <a:p>
+            <a:r>
               <a:t>PRESENTATIETIP</a:t>
             </a:r>
           </a:p>
@@ -1791,6 +1956,17 @@
           <a:lstStyle/>
           <a:p>
             <a:r>
+              <a:t>WAT U ZEGT</a:t>
+            </a:r>
+          </a:p>
+          <a:p>
+            <a:r>
+              <a:t>ISO 14155 vraagt dat per medewerker aantoonbaar is welke training hij kreeg en voor welke handelingen hij gedelegeerd is. Vandaag tekenen. Bij elke nieuwe medewerker opnieuw, en bij elke protocolwijziging opnieuw. Het register blijft bij u; wij krijgen een kopie.</a:t>
+            </a:r>
+          </a:p>
+          <a:p/>
+          <a:p>
+            <a:r>
               <a:t>PRESENTATIETIP</a:t>
             </a:r>
           </a:p>
@@ -1877,6 +2053,17 @@
           <a:lstStyle/>
           <a:p>
             <a:r>
+              <a:t>WAT U ZEGT</a:t>
+            </a:r>
+          </a:p>
+          <a:p>
+            <a:r>
+              <a:t>Tot slot: wie u aanspreekt. Praktische vragen — inclusies, metingen, formulieren, sensoren — komen bij mij. Wetenschappelijke vragen en afspraken op het niveau van uw centrum bij professor Deschamps. Dank u wel.</a:t>
+            </a:r>
+          </a:p>
+          <a:p/>
+          <a:p>
+            <a:r>
               <a:t>PRESENTATIETIP</a:t>
             </a:r>
           </a:p>
@@ -1963,6 +2150,17 @@
           <a:lstStyle/>
           <a:p>
             <a:r>
+              <a:t>WAT U ZEGT</a:t>
+            </a:r>
+          </a:p>
+          <a:p>
+            <a:r>
+              <a:t>Vier fasen. We zitten in de pilot; februari 2027 is de harde startdatum. Daarna twaalf maanden includeren, en achttien maanden opvolgen per patiënt. Alleen de inclusieperiode verschuift de einddatum.</a:t>
+            </a:r>
+          </a:p>
+          <a:p/>
+          <a:p>
+            <a:r>
               <a:t>PRESENTATIETIP</a:t>
             </a:r>
           </a:p>
@@ -2049,6 +2247,17 @@
           <a:lstStyle/>
           <a:p>
             <a:r>
+              <a:t>WAT U ZEGT</a:t>
+            </a:r>
+          </a:p>
+          <a:p>
+            <a:r>
+              <a:t>Dit is wat we van uw organisatie vragen. Vierentwintig inclusies over twaalf maanden, dus gemiddeld twee per maand. Verder één vaste PI, tijd bij de baseline, en een looppad van tien meter. Wat we níét vragen is gegevensinvoer.</a:t>
+            </a:r>
+          </a:p>
+          <a:p/>
+          <a:p>
+            <a:r>
               <a:t>PRESENTATIETIP</a:t>
             </a:r>
           </a:p>
@@ -2135,6 +2344,17 @@
           <a:lstStyle/>
           <a:p>
             <a:r>
+              <a:t>WAT U ZEGT</a:t>
+            </a:r>
+          </a:p>
+          <a:p>
+            <a:r>
+              <a:t>Vier risico's, en wat we eraan doen. Het grootste is niet wetenschappelijk maar organisatorisch: of de centra hun vierentwintig halen. De andere drie zijn ingecalculeerd. Welk risico baart ú het meest zorgen?</a:t>
+            </a:r>
+          </a:p>
+          <a:p/>
+          <a:p>
+            <a:r>
               <a:t>PRESENTATIETIP</a:t>
             </a:r>
           </a:p>
@@ -2221,6 +2441,17 @@
           <a:lstStyle/>
           <a:p>
             <a:r>
+              <a:t>WAT U ZEGT</a:t>
+            </a:r>
+          </a:p>
+          <a:p>
+            <a:r>
+              <a:t>Blok één: waarom de studie zo is opgezet. Vier cijfers, en daarna begrijpt u waarom er twee normen zijn in plaats van één.</a:t>
+            </a:r>
+          </a:p>
+          <a:p/>
+          <a:p>
+            <a:r>
               <a:t>PRESENTATIETIP</a:t>
             </a:r>
           </a:p>
@@ -2299,6 +2530,17 @@
           <a:lstStyle/>
           <a:p>
             <a:r>
+              <a:t>WAT U ZEGT</a:t>
+            </a:r>
+          </a:p>
+          <a:p>
+            <a:r>
+              <a:t>Veertig procent krijgt binnen één jaar een nieuw ulcus. Na vijf jaar is dat vijfenzestig. En de sterfte ligt tweeënhalf keer hoger dan bij diabetes zonder ulcus. Genezing is dus geen eindpunt maar remissie.</a:t>
+            </a:r>
+          </a:p>
+          <a:p/>
+          <a:p>
+            <a:r>
               <a:t>PRESENTATIETIP</a:t>
             </a:r>
           </a:p>
@@ -2385,6 +2627,17 @@
           <a:lstStyle/>
           <a:p>
             <a:r>
+              <a:t>WAT U ZEGT</a:t>
+            </a:r>
+          </a:p>
+          <a:p>
+            <a:r>
+              <a:t>Dezelfde schoen, twee uitkomsten. Over iedereen: geen verschil. Bij wie hem tachtig procent van de stappen dróég: bijna gehalveerd. Daarom meten wij niet alleen druk, maar ook draagtijd.</a:t>
+            </a:r>
+          </a:p>
+          <a:p/>
+          <a:p>
+            <a:r>
               <a:t>PRESENTATIETIP</a:t>
             </a:r>
           </a:p>
@@ -2469,6 +2722,17 @@
         <p:txBody>
           <a:bodyPr/>
           <a:lstStyle/>
+          <a:p>
+            <a:r>
+              <a:t>WAT U ZEGT</a:t>
+            </a:r>
+          </a:p>
+          <a:p>
+            <a:r>
+              <a:t>Eenenzeventig procent draagtijd, gemeten met een sensor en niet gevraagd. Thuis zakt het naar eenenzestig, en juist thuis worden de meeste stappen gezet. Minder dan een derde haalt de tachtig procent.</a:t>
+            </a:r>
+          </a:p>
+          <a:p/>
           <a:p>
             <a:r>
               <a:t>PRESENTATIETIP</a:t>

--- a/PARADISE_presentatie/PARADISE_board.pptx
+++ b/PARADISE_presentatie/PARADISE_board.pptx
@@ -31,6 +31,7 @@
     <p:sldId id="279" r:id="rId31"/>
     <p:sldId id="280" r:id="rId32"/>
     <p:sldId id="281" r:id="rId33"/>
+    <p:sldId id="282" r:id="rId34"/>
   </p:sldIdLst>
   <p:sldSz cx="12191695" cy="6858000" type="screen4x3"/>
   <p:notesSz cx="6858000" cy="9144000"/>
@@ -2301,6 +2302,95 @@
 </p:notes>
 </file>
 
+<file path=ppt/notesSlides/notesSlide27.xml><?xml version="1.0" encoding="utf-8"?>
+<p:notes xmlns:a="http://schemas.openxmlformats.org/drawingml/2006/main" xmlns:p="http://schemas.openxmlformats.org/presentationml/2006/main" xmlns:r="http://schemas.openxmlformats.org/officeDocument/2006/relationships">
+  <p:cSld>
+    <p:spTree>
+      <p:nvGrpSpPr>
+        <p:cNvPr id="1" name=""/>
+        <p:cNvGrpSpPr/>
+        <p:nvPr/>
+      </p:nvGrpSpPr>
+      <p:grpSpPr>
+        <a:xfrm>
+          <a:off x="0" y="0"/>
+          <a:ext cx="0" cy="0"/>
+          <a:chOff x="0" y="0"/>
+          <a:chExt cx="0" cy="0"/>
+        </a:xfrm>
+      </p:grpSpPr>
+      <p:sp>
+        <p:nvSpPr>
+          <p:cNvPr id="2" name="Slide Image Placeholder 1"/>
+          <p:cNvSpPr>
+            <a:spLocks noGrp="1"/>
+          </p:cNvSpPr>
+          <p:nvPr>
+            <p:ph type="sldImg" idx="2"/>
+          </p:nvPr>
+        </p:nvSpPr>
+        <p:spPr/>
+      </p:sp>
+      <p:sp>
+        <p:nvSpPr>
+          <p:cNvPr id="3" name="Notes Placeholder 2"/>
+          <p:cNvSpPr>
+            <a:spLocks noGrp="1"/>
+          </p:cNvSpPr>
+          <p:nvPr>
+            <p:ph type="body" idx="3" sz="quarter"/>
+          </p:nvPr>
+        </p:nvSpPr>
+        <p:spPr/>
+        <p:txBody>
+          <a:bodyPr/>
+          <a:lstStyle/>
+          <a:p>
+            <a:r>
+              <a:t>WAT U ZEGT</a:t>
+            </a:r>
+          </a:p>
+          <a:p>
+            <a:r>
+              <a:t>Deze dia laat u staan tijdens de vragen. Alles wat u genoemd hebt, staat hier met nummer en citaat, in dezelfde nummering als het protocolmanuscript.</a:t>
+            </a:r>
+          </a:p>
+          <a:p/>
+          <a:p>
+            <a:r>
+              <a:t>PRESENTATIETIP</a:t>
+            </a:r>
+          </a:p>
+          <a:p/>
+          <a:p/>
+          <a:p>
+            <a:r>
+              <a:t>INTERACTIE</a:t>
+            </a:r>
+          </a:p>
+          <a:p/>
+        </p:txBody>
+      </p:sp>
+      <p:sp>
+        <p:nvSpPr>
+          <p:cNvPr id="4" name="Slide Number Placeholder 3"/>
+          <p:cNvSpPr>
+            <a:spLocks noGrp="1"/>
+          </p:cNvSpPr>
+          <p:nvPr>
+            <p:ph type="sldNum" idx="5" sz="quarter"/>
+          </p:nvPr>
+        </p:nvSpPr>
+        <p:spPr/>
+      </p:sp>
+    </p:spTree>
+  </p:cSld>
+  <p:clrMapOvr>
+    <a:masterClrMapping/>
+  </p:clrMapOvr>
+</p:notes>
+</file>
+
 <file path=ppt/notesSlides/notesSlide3.xml><?xml version="1.0" encoding="utf-8"?>
 <p:notes xmlns:a="http://schemas.openxmlformats.org/drawingml/2006/main" xmlns:p="http://schemas.openxmlformats.org/presentationml/2006/main" xmlns:r="http://schemas.openxmlformats.org/officeDocument/2006/relationships">
   <p:cSld>
@@ -7448,7 +7538,7 @@
                 </a:solidFill>
                 <a:latin typeface="Consolas"/>
               </a:rPr>
-              <a:t>10 / 26</a:t>
+              <a:t>10 / 27</a:t>
             </a:r>
           </a:p>
         </p:txBody>
@@ -7477,6 +7567,45 @@
           </a:prstGeom>
         </p:spPr>
       </p:pic>
+      <p:sp>
+        <p:nvSpPr>
+          <p:cNvPr id="25" name="TextBox 24"/>
+          <p:cNvSpPr txBox="1"/>
+          <p:nvPr/>
+        </p:nvSpPr>
+        <p:spPr>
+          <a:xfrm>
+            <a:off x="634984" y="6629234"/>
+            <a:ext cx="10921726" cy="177795"/>
+          </a:xfrm>
+          <a:prstGeom prst="rect">
+            <a:avLst/>
+          </a:prstGeom>
+          <a:noFill/>
+        </p:spPr>
+        <p:txBody>
+          <a:bodyPr wrap="square" anchor="t" lIns="0" rIns="0" tIns="0" bIns="0">
+            <a:spAutoFit/>
+          </a:bodyPr>
+          <a:lstStyle/>
+          <a:p>
+            <a:pPr algn="l">
+              <a:lnSpc>
+                <a:spcPct val="125000"/>
+              </a:lnSpc>
+            </a:pPr>
+            <a:r>
+              <a:rPr sz="1000" b="0">
+                <a:solidFill>
+                  <a:srgbClr val="8FB6D0"/>
+                </a:solidFill>
+                <a:latin typeface="Consolas"/>
+              </a:rPr>
+              <a:t>Bron  13 · Waaijman 2013</a:t>
+            </a:r>
+          </a:p>
+        </p:txBody>
+      </p:sp>
     </p:spTree>
   </p:cSld>
   <p:clrMapOvr>
@@ -8440,7 +8569,7 @@
                 </a:solidFill>
                 <a:latin typeface="Consolas"/>
               </a:rPr>
-              <a:t>11 / 26</a:t>
+              <a:t>11 / 27</a:t>
             </a:r>
           </a:p>
         </p:txBody>
@@ -8469,6 +8598,45 @@
           </a:prstGeom>
         </p:spPr>
       </p:pic>
+      <p:sp>
+        <p:nvSpPr>
+          <p:cNvPr id="25" name="TextBox 24"/>
+          <p:cNvSpPr txBox="1"/>
+          <p:nvPr/>
+        </p:nvSpPr>
+        <p:spPr>
+          <a:xfrm>
+            <a:off x="634984" y="6629234"/>
+            <a:ext cx="10921726" cy="177795"/>
+          </a:xfrm>
+          <a:prstGeom prst="rect">
+            <a:avLst/>
+          </a:prstGeom>
+          <a:noFill/>
+        </p:spPr>
+        <p:txBody>
+          <a:bodyPr wrap="square" anchor="t" lIns="0" rIns="0" tIns="0" bIns="0">
+            <a:spAutoFit/>
+          </a:bodyPr>
+          <a:lstStyle/>
+          <a:p>
+            <a:pPr algn="l">
+              <a:lnSpc>
+                <a:spcPct val="125000"/>
+              </a:lnSpc>
+            </a:pPr>
+            <a:r>
+              <a:rPr sz="1000" b="0">
+                <a:solidFill>
+                  <a:srgbClr val="8FB6D0"/>
+                </a:solidFill>
+                <a:latin typeface="Consolas"/>
+              </a:rPr>
+              <a:t>Bron  14 · van Netten 2018   |   16 · Hulshof 2025</a:t>
+            </a:r>
+          </a:p>
+        </p:txBody>
+      </p:sp>
     </p:spTree>
   </p:cSld>
   <p:clrMapOvr>
@@ -9239,7 +9407,7 @@
                 </a:solidFill>
                 <a:latin typeface="Consolas"/>
               </a:rPr>
-              <a:t>12 / 26</a:t>
+              <a:t>12 / 27</a:t>
             </a:r>
           </a:p>
         </p:txBody>
@@ -9268,6 +9436,45 @@
           </a:prstGeom>
         </p:spPr>
       </p:pic>
+      <p:sp>
+        <p:nvSpPr>
+          <p:cNvPr id="19" name="TextBox 18"/>
+          <p:cNvSpPr txBox="1"/>
+          <p:nvPr/>
+        </p:nvSpPr>
+        <p:spPr>
+          <a:xfrm>
+            <a:off x="634984" y="6629234"/>
+            <a:ext cx="10921726" cy="177795"/>
+          </a:xfrm>
+          <a:prstGeom prst="rect">
+            <a:avLst/>
+          </a:prstGeom>
+          <a:noFill/>
+        </p:spPr>
+        <p:txBody>
+          <a:bodyPr wrap="square" anchor="t" lIns="0" rIns="0" tIns="0" bIns="0">
+            <a:spAutoFit/>
+          </a:bodyPr>
+          <a:lstStyle/>
+          <a:p>
+            <a:pPr algn="l">
+              <a:lnSpc>
+                <a:spcPct val="125000"/>
+              </a:lnSpc>
+            </a:pPr>
+            <a:r>
+              <a:rPr sz="1000" b="0">
+                <a:solidFill>
+                  <a:srgbClr val="8FB6D0"/>
+                </a:solidFill>
+                <a:latin typeface="Consolas"/>
+              </a:rPr>
+              <a:t>Bron  6 · Bus 2011   |   7 · Bus 2020   |   17 · Waaijman 2014</a:t>
+            </a:r>
+          </a:p>
+        </p:txBody>
+      </p:sp>
     </p:spTree>
   </p:cSld>
   <p:clrMapOvr>
@@ -9535,7 +9742,7 @@
                 </a:solidFill>
                 <a:latin typeface="Consolas"/>
               </a:rPr>
-              <a:t>13 / 26</a:t>
+              <a:t>13 / 27</a:t>
             </a:r>
           </a:p>
         </p:txBody>
@@ -27733,7 +27940,7 @@
                 </a:solidFill>
                 <a:latin typeface="Consolas"/>
               </a:rPr>
-              <a:t>14 / 26</a:t>
+              <a:t>14 / 27</a:t>
             </a:r>
           </a:p>
         </p:txBody>
@@ -27762,6 +27969,45 @@
           </a:prstGeom>
         </p:spPr>
       </p:pic>
+      <p:sp>
+        <p:nvSpPr>
+          <p:cNvPr id="402" name="TextBox 401"/>
+          <p:cNvSpPr txBox="1"/>
+          <p:nvPr/>
+        </p:nvSpPr>
+        <p:spPr>
+          <a:xfrm>
+            <a:off x="634984" y="6629234"/>
+            <a:ext cx="10921726" cy="177795"/>
+          </a:xfrm>
+          <a:prstGeom prst="rect">
+            <a:avLst/>
+          </a:prstGeom>
+          <a:noFill/>
+        </p:spPr>
+        <p:txBody>
+          <a:bodyPr wrap="square" anchor="t" lIns="0" rIns="0" tIns="0" bIns="0">
+            <a:spAutoFit/>
+          </a:bodyPr>
+          <a:lstStyle/>
+          <a:p>
+            <a:pPr algn="l">
+              <a:lnSpc>
+                <a:spcPct val="125000"/>
+              </a:lnSpc>
+            </a:pPr>
+            <a:r>
+              <a:rPr sz="1000" b="0">
+                <a:solidFill>
+                  <a:srgbClr val="8FB6D0"/>
+                </a:solidFill>
+                <a:latin typeface="Consolas"/>
+              </a:rPr>
+              <a:t>Bron  7 · Bus 2020   |   27 · Zwaferink 2024</a:t>
+            </a:r>
+          </a:p>
+        </p:txBody>
+      </p:sp>
     </p:spTree>
   </p:cSld>
   <p:clrMapOvr>
@@ -45955,7 +46201,7 @@
                 </a:solidFill>
                 <a:latin typeface="Consolas"/>
               </a:rPr>
-              <a:t>15 / 26</a:t>
+              <a:t>15 / 27</a:t>
             </a:r>
           </a:p>
         </p:txBody>
@@ -45984,6 +46230,45 @@
           </a:prstGeom>
         </p:spPr>
       </p:pic>
+      <p:sp>
+        <p:nvSpPr>
+          <p:cNvPr id="402" name="TextBox 401"/>
+          <p:cNvSpPr txBox="1"/>
+          <p:nvPr/>
+        </p:nvSpPr>
+        <p:spPr>
+          <a:xfrm>
+            <a:off x="634984" y="6629234"/>
+            <a:ext cx="10921726" cy="177795"/>
+          </a:xfrm>
+          <a:prstGeom prst="rect">
+            <a:avLst/>
+          </a:prstGeom>
+          <a:noFill/>
+        </p:spPr>
+        <p:txBody>
+          <a:bodyPr wrap="square" anchor="t" lIns="0" rIns="0" tIns="0" bIns="0">
+            <a:spAutoFit/>
+          </a:bodyPr>
+          <a:lstStyle/>
+          <a:p>
+            <a:pPr algn="l">
+              <a:lnSpc>
+                <a:spcPct val="125000"/>
+              </a:lnSpc>
+            </a:pPr>
+            <a:r>
+              <a:rPr sz="1000" b="0">
+                <a:solidFill>
+                  <a:srgbClr val="8FB6D0"/>
+                </a:solidFill>
+                <a:latin typeface="Consolas"/>
+              </a:rPr>
+              <a:t>Bron  6 · Bus 2011   |   7 · Bus 2020</a:t>
+            </a:r>
+          </a:p>
+        </p:txBody>
+      </p:sp>
     </p:spTree>
   </p:cSld>
   <p:clrMapOvr>
@@ -46482,7 +46767,7 @@
                 </a:solidFill>
                 <a:latin typeface="Consolas"/>
               </a:rPr>
-              <a:t>17 / 26</a:t>
+              <a:t>17 / 27</a:t>
             </a:r>
           </a:p>
         </p:txBody>
@@ -48375,7 +48660,7 @@
                 </a:solidFill>
                 <a:latin typeface="Consolas"/>
               </a:rPr>
-              <a:t>18 / 26</a:t>
+              <a:t>18 / 27</a:t>
             </a:r>
           </a:p>
         </p:txBody>
@@ -50292,7 +50577,7 @@
                 </a:solidFill>
                 <a:latin typeface="Consolas"/>
               </a:rPr>
-              <a:t>19 / 26</a:t>
+              <a:t>19 / 27</a:t>
             </a:r>
           </a:p>
         </p:txBody>
@@ -58096,7 +58381,7 @@
                 </a:solidFill>
                 <a:latin typeface="Consolas"/>
               </a:rPr>
-              <a:t>02 / 26</a:t>
+              <a:t>02 / 27</a:t>
             </a:r>
           </a:p>
         </p:txBody>
@@ -58125,6 +58410,45 @@
           </a:prstGeom>
         </p:spPr>
       </p:pic>
+      <p:sp>
+        <p:nvSpPr>
+          <p:cNvPr id="180" name="TextBox 179"/>
+          <p:cNvSpPr txBox="1"/>
+          <p:nvPr/>
+        </p:nvSpPr>
+        <p:spPr>
+          <a:xfrm>
+            <a:off x="634984" y="6629234"/>
+            <a:ext cx="10921726" cy="177795"/>
+          </a:xfrm>
+          <a:prstGeom prst="rect">
+            <a:avLst/>
+          </a:prstGeom>
+          <a:noFill/>
+        </p:spPr>
+        <p:txBody>
+          <a:bodyPr wrap="square" anchor="t" lIns="0" rIns="0" tIns="0" bIns="0">
+            <a:spAutoFit/>
+          </a:bodyPr>
+          <a:lstStyle/>
+          <a:p>
+            <a:pPr algn="l">
+              <a:lnSpc>
+                <a:spcPct val="125000"/>
+              </a:lnSpc>
+            </a:pPr>
+            <a:r>
+              <a:rPr sz="1000" b="0">
+                <a:solidFill>
+                  <a:srgbClr val="8FB6D0"/>
+                </a:solidFill>
+                <a:latin typeface="Consolas"/>
+              </a:rPr>
+              <a:t>Bron  20 · Morbach 2016</a:t>
+            </a:r>
+          </a:p>
+        </p:txBody>
+      </p:sp>
     </p:spTree>
   </p:cSld>
   <p:clrMapOvr>
@@ -58392,7 +58716,7 @@
                 </a:solidFill>
                 <a:latin typeface="Consolas"/>
               </a:rPr>
-              <a:t>20 / 26</a:t>
+              <a:t>20 / 27</a:t>
             </a:r>
           </a:p>
         </p:txBody>
@@ -59560,7 +59884,7 @@
                 </a:solidFill>
                 <a:latin typeface="Consolas"/>
               </a:rPr>
-              <a:t>21 / 26</a:t>
+              <a:t>21 / 27</a:t>
             </a:r>
           </a:p>
         </p:txBody>
@@ -59589,6 +59913,45 @@
           </a:prstGeom>
         </p:spPr>
       </p:pic>
+      <p:sp>
+        <p:nvSpPr>
+          <p:cNvPr id="30" name="TextBox 29"/>
+          <p:cNvSpPr txBox="1"/>
+          <p:nvPr/>
+        </p:nvSpPr>
+        <p:spPr>
+          <a:xfrm>
+            <a:off x="634984" y="6629234"/>
+            <a:ext cx="10921726" cy="177795"/>
+          </a:xfrm>
+          <a:prstGeom prst="rect">
+            <a:avLst/>
+          </a:prstGeom>
+          <a:noFill/>
+        </p:spPr>
+        <p:txBody>
+          <a:bodyPr wrap="square" anchor="t" lIns="0" rIns="0" tIns="0" bIns="0">
+            <a:spAutoFit/>
+          </a:bodyPr>
+          <a:lstStyle/>
+          <a:p>
+            <a:pPr algn="l">
+              <a:lnSpc>
+                <a:spcPct val="125000"/>
+              </a:lnSpc>
+            </a:pPr>
+            <a:r>
+              <a:rPr sz="1000" b="0">
+                <a:solidFill>
+                  <a:srgbClr val="8FB6D0"/>
+                </a:solidFill>
+                <a:latin typeface="Consolas"/>
+              </a:rPr>
+              <a:t>Bron  18 · Lutjeboer 2018</a:t>
+            </a:r>
+          </a:p>
+        </p:txBody>
+      </p:sp>
     </p:spTree>
   </p:cSld>
   <p:clrMapOvr>
@@ -59882,7 +60245,7 @@
                 </a:solidFill>
                 <a:latin typeface="Consolas"/>
               </a:rPr>
-              <a:t>22 / 26</a:t>
+              <a:t>22 / 27</a:t>
             </a:r>
           </a:p>
         </p:txBody>
@@ -59911,6 +60274,45 @@
           </a:prstGeom>
         </p:spPr>
       </p:pic>
+      <p:sp>
+        <p:nvSpPr>
+          <p:cNvPr id="9" name="TextBox 8"/>
+          <p:cNvSpPr txBox="1"/>
+          <p:nvPr/>
+        </p:nvSpPr>
+        <p:spPr>
+          <a:xfrm>
+            <a:off x="634984" y="6629234"/>
+            <a:ext cx="10921726" cy="177795"/>
+          </a:xfrm>
+          <a:prstGeom prst="rect">
+            <a:avLst/>
+          </a:prstGeom>
+          <a:noFill/>
+        </p:spPr>
+        <p:txBody>
+          <a:bodyPr wrap="square" anchor="t" lIns="0" rIns="0" tIns="0" bIns="0">
+            <a:spAutoFit/>
+          </a:bodyPr>
+          <a:lstStyle/>
+          <a:p>
+            <a:pPr algn="l">
+              <a:lnSpc>
+                <a:spcPct val="125000"/>
+              </a:lnSpc>
+            </a:pPr>
+            <a:r>
+              <a:rPr sz="1000" b="0">
+                <a:solidFill>
+                  <a:srgbClr val="8FB6D0"/>
+                </a:solidFill>
+                <a:latin typeface="Consolas"/>
+              </a:rPr>
+              <a:t>Bron  18 · Lutjeboer 2018</a:t>
+            </a:r>
+          </a:p>
+        </p:txBody>
+      </p:sp>
     </p:spTree>
   </p:cSld>
   <p:clrMapOvr>
@@ -61477,7 +61879,7 @@
                 </a:solidFill>
                 <a:latin typeface="Consolas"/>
               </a:rPr>
-              <a:t>23 / 26</a:t>
+              <a:t>23 / 27</a:t>
             </a:r>
           </a:p>
         </p:txBody>
@@ -61506,6 +61908,45 @@
           </a:prstGeom>
         </p:spPr>
       </p:pic>
+      <p:sp>
+        <p:nvSpPr>
+          <p:cNvPr id="40" name="TextBox 39"/>
+          <p:cNvSpPr txBox="1"/>
+          <p:nvPr/>
+        </p:nvSpPr>
+        <p:spPr>
+          <a:xfrm>
+            <a:off x="634984" y="6629234"/>
+            <a:ext cx="10921726" cy="177795"/>
+          </a:xfrm>
+          <a:prstGeom prst="rect">
+            <a:avLst/>
+          </a:prstGeom>
+          <a:noFill/>
+        </p:spPr>
+        <p:txBody>
+          <a:bodyPr wrap="square" anchor="t" lIns="0" rIns="0" tIns="0" bIns="0">
+            <a:spAutoFit/>
+          </a:bodyPr>
+          <a:lstStyle/>
+          <a:p>
+            <a:pPr algn="l">
+              <a:lnSpc>
+                <a:spcPct val="125000"/>
+              </a:lnSpc>
+            </a:pPr>
+            <a:r>
+              <a:rPr sz="1000" b="0">
+                <a:solidFill>
+                  <a:srgbClr val="8FB6D0"/>
+                </a:solidFill>
+                <a:latin typeface="Consolas"/>
+              </a:rPr>
+              <a:t>Bron  8 · IWGDF 2023, preventie</a:t>
+            </a:r>
+          </a:p>
+        </p:txBody>
+      </p:sp>
     </p:spTree>
   </p:cSld>
   <p:clrMapOvr>
@@ -62399,7 +62840,7 @@
                 </a:solidFill>
                 <a:latin typeface="Consolas"/>
               </a:rPr>
-              <a:t>24 / 26</a:t>
+              <a:t>24 / 27</a:t>
             </a:r>
           </a:p>
         </p:txBody>
@@ -63114,7 +63555,7 @@
                 </a:solidFill>
                 <a:latin typeface="Consolas"/>
               </a:rPr>
-              <a:t>25 / 26</a:t>
+              <a:t>25 / 27</a:t>
             </a:r>
           </a:p>
         </p:txBody>
@@ -63143,6 +63584,45 @@
           </a:prstGeom>
         </p:spPr>
       </p:pic>
+      <p:sp>
+        <p:nvSpPr>
+          <p:cNvPr id="19" name="TextBox 18"/>
+          <p:cNvSpPr txBox="1"/>
+          <p:nvPr/>
+        </p:nvSpPr>
+        <p:spPr>
+          <a:xfrm>
+            <a:off x="634984" y="6629234"/>
+            <a:ext cx="10921726" cy="177795"/>
+          </a:xfrm>
+          <a:prstGeom prst="rect">
+            <a:avLst/>
+          </a:prstGeom>
+          <a:noFill/>
+        </p:spPr>
+        <p:txBody>
+          <a:bodyPr wrap="square" anchor="t" lIns="0" rIns="0" tIns="0" bIns="0">
+            <a:spAutoFit/>
+          </a:bodyPr>
+          <a:lstStyle/>
+          <a:p>
+            <a:pPr algn="l">
+              <a:lnSpc>
+                <a:spcPct val="125000"/>
+              </a:lnSpc>
+            </a:pPr>
+            <a:r>
+              <a:rPr sz="1000" b="0">
+                <a:solidFill>
+                  <a:srgbClr val="8FB6D0"/>
+                </a:solidFill>
+                <a:latin typeface="Consolas"/>
+              </a:rPr>
+              <a:t>Bron  21 · SPIRIT 2025</a:t>
+            </a:r>
+          </a:p>
+        </p:txBody>
+      </p:sp>
     </p:spTree>
   </p:cSld>
   <p:clrMapOvr>
@@ -63970,7 +64450,7 @@
                 </a:solidFill>
                 <a:latin typeface="Consolas"/>
               </a:rPr>
-              <a:t>26 / 26</a:t>
+              <a:t>26 / 27</a:t>
             </a:r>
           </a:p>
         </p:txBody>
@@ -64019,6 +64499,1351 @@
 </p:sld>
 </file>
 
+<file path=ppt/slides/slide27.xml><?xml version="1.0" encoding="utf-8"?>
+<p:sld xmlns:a="http://schemas.openxmlformats.org/drawingml/2006/main" xmlns:p="http://schemas.openxmlformats.org/presentationml/2006/main" xmlns:r="http://schemas.openxmlformats.org/officeDocument/2006/relationships">
+  <p:cSld>
+    <p:spTree>
+      <p:nvGrpSpPr>
+        <p:cNvPr id="1" name=""/>
+        <p:cNvGrpSpPr/>
+        <p:nvPr/>
+      </p:nvGrpSpPr>
+      <p:grpSpPr/>
+      <p:sp>
+        <p:nvSpPr>
+          <p:cNvPr id="2" name="Rectangle 1"/>
+          <p:cNvSpPr/>
+          <p:nvPr/>
+        </p:nvSpPr>
+        <p:spPr>
+          <a:xfrm>
+            <a:off x="0" y="0"/>
+            <a:ext cx="12191695" cy="6857828"/>
+          </a:xfrm>
+          <a:prstGeom prst="rect">
+            <a:avLst/>
+          </a:prstGeom>
+          <a:gradFill rotWithShape="1">
+            <a:gsLst>
+              <a:gs pos="0">
+                <a:srgbClr val="072138"/>
+              </a:gs>
+              <a:gs pos="100000">
+                <a:srgbClr val="04182A"/>
+              </a:gs>
+            </a:gsLst>
+            <a:lin ang="5400000" scaled="0"/>
+          </a:gradFill>
+          <a:ln>
+            <a:noFill/>
+          </a:ln>
+          <a:effectLst/>
+        </p:spPr>
+        <p:style>
+          <a:lnRef idx="1">
+            <a:schemeClr val="accent1"/>
+          </a:lnRef>
+          <a:fillRef idx="3">
+            <a:schemeClr val="accent1"/>
+          </a:fillRef>
+          <a:effectRef idx="2">
+            <a:schemeClr val="accent1"/>
+          </a:effectRef>
+          <a:fontRef idx="minor">
+            <a:schemeClr val="lt1"/>
+          </a:fontRef>
+        </p:style>
+        <p:txBody>
+          <a:bodyPr rtlCol="0" anchor="ctr"/>
+          <a:lstStyle/>
+          <a:p>
+            <a:pPr algn="ctr"/>
+          </a:p>
+        </p:txBody>
+      </p:sp>
+      <p:sp>
+        <p:nvSpPr>
+          <p:cNvPr id="3" name="TextBox 2"/>
+          <p:cNvSpPr txBox="1"/>
+          <p:nvPr/>
+        </p:nvSpPr>
+        <p:spPr>
+          <a:xfrm>
+            <a:off x="634984" y="571485"/>
+            <a:ext cx="9524761" cy="215894"/>
+          </a:xfrm>
+          <a:prstGeom prst="rect">
+            <a:avLst/>
+          </a:prstGeom>
+          <a:noFill/>
+        </p:spPr>
+        <p:txBody>
+          <a:bodyPr wrap="square" anchor="t" lIns="0" rIns="0" tIns="0" bIns="0">
+            <a:spAutoFit/>
+          </a:bodyPr>
+          <a:lstStyle/>
+          <a:p>
+            <a:pPr algn="l">
+              <a:lnSpc>
+                <a:spcPct val="125000"/>
+              </a:lnSpc>
+            </a:pPr>
+            <a:r>
+              <a:rPr sz="1250" b="1" spc="240">
+                <a:solidFill>
+                  <a:srgbClr val="52BDEC"/>
+                </a:solidFill>
+                <a:latin typeface="Consolas"/>
+              </a:rPr>
+              <a:t>WAAR DE CIJFERS VANDAAN KOMEN</a:t>
+            </a:r>
+          </a:p>
+        </p:txBody>
+      </p:sp>
+      <p:sp>
+        <p:nvSpPr>
+          <p:cNvPr id="4" name="sectietitel"/>
+          <p:cNvSpPr txBox="1"/>
+          <p:nvPr/>
+        </p:nvSpPr>
+        <p:spPr>
+          <a:xfrm>
+            <a:off x="634984" y="838179"/>
+            <a:ext cx="9905752" cy="1269968"/>
+          </a:xfrm>
+          <a:prstGeom prst="rect">
+            <a:avLst/>
+          </a:prstGeom>
+          <a:noFill/>
+        </p:spPr>
+        <p:txBody>
+          <a:bodyPr wrap="square" anchor="t" lIns="0" rIns="0" tIns="0" bIns="0">
+            <a:spAutoFit/>
+          </a:bodyPr>
+          <a:lstStyle/>
+          <a:p>
+            <a:pPr algn="l">
+              <a:lnSpc>
+                <a:spcPct val="110000"/>
+              </a:lnSpc>
+            </a:pPr>
+            <a:r>
+              <a:rPr sz="4000" b="1">
+                <a:solidFill>
+                  <a:srgbClr val="F2F8FC"/>
+                </a:solidFill>
+                <a:latin typeface="Segoe UI"/>
+              </a:rPr>
+              <a:t>Referenties</a:t>
+            </a:r>
+          </a:p>
+        </p:txBody>
+      </p:sp>
+      <p:sp>
+        <p:nvSpPr>
+          <p:cNvPr id="5" name="TextBox 4"/>
+          <p:cNvSpPr txBox="1"/>
+          <p:nvPr/>
+        </p:nvSpPr>
+        <p:spPr>
+          <a:xfrm>
+            <a:off x="634984" y="1854153"/>
+            <a:ext cx="279393" cy="190495"/>
+          </a:xfrm>
+          <a:prstGeom prst="rect">
+            <a:avLst/>
+          </a:prstGeom>
+          <a:noFill/>
+        </p:spPr>
+        <p:txBody>
+          <a:bodyPr wrap="square" anchor="t" lIns="0" rIns="0" tIns="0" bIns="0">
+            <a:spAutoFit/>
+          </a:bodyPr>
+          <a:lstStyle/>
+          <a:p>
+            <a:pPr algn="r">
+              <a:lnSpc>
+                <a:spcPct val="125000"/>
+              </a:lnSpc>
+            </a:pPr>
+            <a:r>
+              <a:rPr sz="1200" b="1">
+                <a:solidFill>
+                  <a:srgbClr val="52BDEC"/>
+                </a:solidFill>
+                <a:latin typeface="Consolas"/>
+              </a:rPr>
+              <a:t>1</a:t>
+            </a:r>
+          </a:p>
+        </p:txBody>
+      </p:sp>
+      <p:sp>
+        <p:nvSpPr>
+          <p:cNvPr id="6" name="TextBox 5"/>
+          <p:cNvSpPr txBox="1"/>
+          <p:nvPr/>
+        </p:nvSpPr>
+        <p:spPr>
+          <a:xfrm>
+            <a:off x="965175" y="1854153"/>
+            <a:ext cx="5054346" cy="296217"/>
+          </a:xfrm>
+          <a:prstGeom prst="rect">
+            <a:avLst/>
+          </a:prstGeom>
+          <a:noFill/>
+        </p:spPr>
+        <p:txBody>
+          <a:bodyPr wrap="square" anchor="t" lIns="0" rIns="0" tIns="0" bIns="0">
+            <a:spAutoFit/>
+          </a:bodyPr>
+          <a:lstStyle/>
+          <a:p>
+            <a:pPr algn="l">
+              <a:lnSpc>
+                <a:spcPct val="132000"/>
+              </a:lnSpc>
+            </a:pPr>
+            <a:r>
+              <a:rPr sz="1200" b="0">
+                <a:solidFill>
+                  <a:srgbClr val="8FB6D0"/>
+                </a:solidFill>
+                <a:latin typeface="Segoe UI"/>
+              </a:rPr>
+              <a:t>Armstrong DG et al. N Engl J Med. 2017;376(24):2367–75.</a:t>
+            </a:r>
+          </a:p>
+        </p:txBody>
+      </p:sp>
+      <p:sp>
+        <p:nvSpPr>
+          <p:cNvPr id="7" name="TextBox 6"/>
+          <p:cNvSpPr txBox="1"/>
+          <p:nvPr/>
+        </p:nvSpPr>
+        <p:spPr>
+          <a:xfrm>
+            <a:off x="634984" y="2188470"/>
+            <a:ext cx="279393" cy="190495"/>
+          </a:xfrm>
+          <a:prstGeom prst="rect">
+            <a:avLst/>
+          </a:prstGeom>
+          <a:noFill/>
+        </p:spPr>
+        <p:txBody>
+          <a:bodyPr wrap="square" anchor="t" lIns="0" rIns="0" tIns="0" bIns="0">
+            <a:spAutoFit/>
+          </a:bodyPr>
+          <a:lstStyle/>
+          <a:p>
+            <a:pPr algn="r">
+              <a:lnSpc>
+                <a:spcPct val="125000"/>
+              </a:lnSpc>
+            </a:pPr>
+            <a:r>
+              <a:rPr sz="1200" b="1">
+                <a:solidFill>
+                  <a:srgbClr val="52BDEC"/>
+                </a:solidFill>
+                <a:latin typeface="Consolas"/>
+              </a:rPr>
+              <a:t>5</a:t>
+            </a:r>
+          </a:p>
+        </p:txBody>
+      </p:sp>
+      <p:sp>
+        <p:nvSpPr>
+          <p:cNvPr id="8" name="TextBox 7"/>
+          <p:cNvSpPr txBox="1"/>
+          <p:nvPr/>
+        </p:nvSpPr>
+        <p:spPr>
+          <a:xfrm>
+            <a:off x="965175" y="2188470"/>
+            <a:ext cx="5054346" cy="296217"/>
+          </a:xfrm>
+          <a:prstGeom prst="rect">
+            <a:avLst/>
+          </a:prstGeom>
+          <a:noFill/>
+        </p:spPr>
+        <p:txBody>
+          <a:bodyPr wrap="square" anchor="t" lIns="0" rIns="0" tIns="0" bIns="0">
+            <a:spAutoFit/>
+          </a:bodyPr>
+          <a:lstStyle/>
+          <a:p>
+            <a:pPr algn="l">
+              <a:lnSpc>
+                <a:spcPct val="132000"/>
+              </a:lnSpc>
+            </a:pPr>
+            <a:r>
+              <a:rPr sz="1200" b="0">
+                <a:solidFill>
+                  <a:srgbClr val="8FB6D0"/>
+                </a:solidFill>
+                <a:latin typeface="Segoe UI"/>
+              </a:rPr>
+              <a:t>Bus SA et al. Diabetes Metab Res Rev. 2016;32(Suppl 1):195–200.</a:t>
+            </a:r>
+          </a:p>
+        </p:txBody>
+      </p:sp>
+      <p:sp>
+        <p:nvSpPr>
+          <p:cNvPr id="9" name="TextBox 8"/>
+          <p:cNvSpPr txBox="1"/>
+          <p:nvPr/>
+        </p:nvSpPr>
+        <p:spPr>
+          <a:xfrm>
+            <a:off x="634984" y="2522786"/>
+            <a:ext cx="279393" cy="190495"/>
+          </a:xfrm>
+          <a:prstGeom prst="rect">
+            <a:avLst/>
+          </a:prstGeom>
+          <a:noFill/>
+        </p:spPr>
+        <p:txBody>
+          <a:bodyPr wrap="square" anchor="t" lIns="0" rIns="0" tIns="0" bIns="0">
+            <a:spAutoFit/>
+          </a:bodyPr>
+          <a:lstStyle/>
+          <a:p>
+            <a:pPr algn="r">
+              <a:lnSpc>
+                <a:spcPct val="125000"/>
+              </a:lnSpc>
+            </a:pPr>
+            <a:r>
+              <a:rPr sz="1200" b="1">
+                <a:solidFill>
+                  <a:srgbClr val="52BDEC"/>
+                </a:solidFill>
+                <a:latin typeface="Consolas"/>
+              </a:rPr>
+              <a:t>6</a:t>
+            </a:r>
+          </a:p>
+        </p:txBody>
+      </p:sp>
+      <p:sp>
+        <p:nvSpPr>
+          <p:cNvPr id="10" name="TextBox 9"/>
+          <p:cNvSpPr txBox="1"/>
+          <p:nvPr/>
+        </p:nvSpPr>
+        <p:spPr>
+          <a:xfrm>
+            <a:off x="965175" y="2522786"/>
+            <a:ext cx="5054346" cy="296217"/>
+          </a:xfrm>
+          <a:prstGeom prst="rect">
+            <a:avLst/>
+          </a:prstGeom>
+          <a:noFill/>
+        </p:spPr>
+        <p:txBody>
+          <a:bodyPr wrap="square" anchor="t" lIns="0" rIns="0" tIns="0" bIns="0">
+            <a:spAutoFit/>
+          </a:bodyPr>
+          <a:lstStyle/>
+          <a:p>
+            <a:pPr algn="l">
+              <a:lnSpc>
+                <a:spcPct val="132000"/>
+              </a:lnSpc>
+            </a:pPr>
+            <a:r>
+              <a:rPr sz="1200" b="0">
+                <a:solidFill>
+                  <a:srgbClr val="8FB6D0"/>
+                </a:solidFill>
+                <a:latin typeface="Segoe UI"/>
+              </a:rPr>
+              <a:t>Bus SA et al. Diabetes Care. 2011;34(7):1595–600.</a:t>
+            </a:r>
+          </a:p>
+        </p:txBody>
+      </p:sp>
+      <p:sp>
+        <p:nvSpPr>
+          <p:cNvPr id="11" name="TextBox 10"/>
+          <p:cNvSpPr txBox="1"/>
+          <p:nvPr/>
+        </p:nvSpPr>
+        <p:spPr>
+          <a:xfrm>
+            <a:off x="634984" y="2857103"/>
+            <a:ext cx="279393" cy="190495"/>
+          </a:xfrm>
+          <a:prstGeom prst="rect">
+            <a:avLst/>
+          </a:prstGeom>
+          <a:noFill/>
+        </p:spPr>
+        <p:txBody>
+          <a:bodyPr wrap="square" anchor="t" lIns="0" rIns="0" tIns="0" bIns="0">
+            <a:spAutoFit/>
+          </a:bodyPr>
+          <a:lstStyle/>
+          <a:p>
+            <a:pPr algn="r">
+              <a:lnSpc>
+                <a:spcPct val="125000"/>
+              </a:lnSpc>
+            </a:pPr>
+            <a:r>
+              <a:rPr sz="1200" b="1">
+                <a:solidFill>
+                  <a:srgbClr val="52BDEC"/>
+                </a:solidFill>
+                <a:latin typeface="Consolas"/>
+              </a:rPr>
+              <a:t>7</a:t>
+            </a:r>
+          </a:p>
+        </p:txBody>
+      </p:sp>
+      <p:sp>
+        <p:nvSpPr>
+          <p:cNvPr id="12" name="TextBox 11"/>
+          <p:cNvSpPr txBox="1"/>
+          <p:nvPr/>
+        </p:nvSpPr>
+        <p:spPr>
+          <a:xfrm>
+            <a:off x="965175" y="2857103"/>
+            <a:ext cx="5054346" cy="296217"/>
+          </a:xfrm>
+          <a:prstGeom prst="rect">
+            <a:avLst/>
+          </a:prstGeom>
+          <a:noFill/>
+        </p:spPr>
+        <p:txBody>
+          <a:bodyPr wrap="square" anchor="t" lIns="0" rIns="0" tIns="0" bIns="0">
+            <a:spAutoFit/>
+          </a:bodyPr>
+          <a:lstStyle/>
+          <a:p>
+            <a:pPr algn="l">
+              <a:lnSpc>
+                <a:spcPct val="132000"/>
+              </a:lnSpc>
+            </a:pPr>
+            <a:r>
+              <a:rPr sz="1200" b="0">
+                <a:solidFill>
+                  <a:srgbClr val="8FB6D0"/>
+                </a:solidFill>
+                <a:latin typeface="Segoe UI"/>
+              </a:rPr>
+              <a:t>Bus SA et al. Diabetes Metab Res Rev. 2020;36(S1):e3237.</a:t>
+            </a:r>
+          </a:p>
+        </p:txBody>
+      </p:sp>
+      <p:sp>
+        <p:nvSpPr>
+          <p:cNvPr id="13" name="TextBox 12"/>
+          <p:cNvSpPr txBox="1"/>
+          <p:nvPr/>
+        </p:nvSpPr>
+        <p:spPr>
+          <a:xfrm>
+            <a:off x="634984" y="3191420"/>
+            <a:ext cx="279393" cy="190495"/>
+          </a:xfrm>
+          <a:prstGeom prst="rect">
+            <a:avLst/>
+          </a:prstGeom>
+          <a:noFill/>
+        </p:spPr>
+        <p:txBody>
+          <a:bodyPr wrap="square" anchor="t" lIns="0" rIns="0" tIns="0" bIns="0">
+            <a:spAutoFit/>
+          </a:bodyPr>
+          <a:lstStyle/>
+          <a:p>
+            <a:pPr algn="r">
+              <a:lnSpc>
+                <a:spcPct val="125000"/>
+              </a:lnSpc>
+            </a:pPr>
+            <a:r>
+              <a:rPr sz="1200" b="1">
+                <a:solidFill>
+                  <a:srgbClr val="52BDEC"/>
+                </a:solidFill>
+                <a:latin typeface="Consolas"/>
+              </a:rPr>
+              <a:t>8</a:t>
+            </a:r>
+          </a:p>
+        </p:txBody>
+      </p:sp>
+      <p:sp>
+        <p:nvSpPr>
+          <p:cNvPr id="14" name="TextBox 13"/>
+          <p:cNvSpPr txBox="1"/>
+          <p:nvPr/>
+        </p:nvSpPr>
+        <p:spPr>
+          <a:xfrm>
+            <a:off x="965175" y="3191420"/>
+            <a:ext cx="5054346" cy="296217"/>
+          </a:xfrm>
+          <a:prstGeom prst="rect">
+            <a:avLst/>
+          </a:prstGeom>
+          <a:noFill/>
+        </p:spPr>
+        <p:txBody>
+          <a:bodyPr wrap="square" anchor="t" lIns="0" rIns="0" tIns="0" bIns="0">
+            <a:spAutoFit/>
+          </a:bodyPr>
+          <a:lstStyle/>
+          <a:p>
+            <a:pPr algn="l">
+              <a:lnSpc>
+                <a:spcPct val="132000"/>
+              </a:lnSpc>
+            </a:pPr>
+            <a:r>
+              <a:rPr sz="1200" b="0">
+                <a:solidFill>
+                  <a:srgbClr val="8FB6D0"/>
+                </a:solidFill>
+                <a:latin typeface="Segoe UI"/>
+              </a:rPr>
+              <a:t>Bus SA et al. Diabetes Metab Res Rev. 2024;40(3):e3651.</a:t>
+            </a:r>
+          </a:p>
+        </p:txBody>
+      </p:sp>
+      <p:sp>
+        <p:nvSpPr>
+          <p:cNvPr id="15" name="TextBox 14"/>
+          <p:cNvSpPr txBox="1"/>
+          <p:nvPr/>
+        </p:nvSpPr>
+        <p:spPr>
+          <a:xfrm>
+            <a:off x="634984" y="3525736"/>
+            <a:ext cx="279393" cy="190495"/>
+          </a:xfrm>
+          <a:prstGeom prst="rect">
+            <a:avLst/>
+          </a:prstGeom>
+          <a:noFill/>
+        </p:spPr>
+        <p:txBody>
+          <a:bodyPr wrap="square" anchor="t" lIns="0" rIns="0" tIns="0" bIns="0">
+            <a:spAutoFit/>
+          </a:bodyPr>
+          <a:lstStyle/>
+          <a:p>
+            <a:pPr algn="r">
+              <a:lnSpc>
+                <a:spcPct val="125000"/>
+              </a:lnSpc>
+            </a:pPr>
+            <a:r>
+              <a:rPr sz="1200" b="1">
+                <a:solidFill>
+                  <a:srgbClr val="52BDEC"/>
+                </a:solidFill>
+                <a:latin typeface="Consolas"/>
+              </a:rPr>
+              <a:t>9</a:t>
+            </a:r>
+          </a:p>
+        </p:txBody>
+      </p:sp>
+      <p:sp>
+        <p:nvSpPr>
+          <p:cNvPr id="16" name="TextBox 15"/>
+          <p:cNvSpPr txBox="1"/>
+          <p:nvPr/>
+        </p:nvSpPr>
+        <p:spPr>
+          <a:xfrm>
+            <a:off x="965175" y="3525736"/>
+            <a:ext cx="5054346" cy="296217"/>
+          </a:xfrm>
+          <a:prstGeom prst="rect">
+            <a:avLst/>
+          </a:prstGeom>
+          <a:noFill/>
+        </p:spPr>
+        <p:txBody>
+          <a:bodyPr wrap="square" anchor="t" lIns="0" rIns="0" tIns="0" bIns="0">
+            <a:spAutoFit/>
+          </a:bodyPr>
+          <a:lstStyle/>
+          <a:p>
+            <a:pPr algn="l">
+              <a:lnSpc>
+                <a:spcPct val="132000"/>
+              </a:lnSpc>
+            </a:pPr>
+            <a:r>
+              <a:rPr sz="1200" b="0">
+                <a:solidFill>
+                  <a:srgbClr val="8FB6D0"/>
+                </a:solidFill>
+                <a:latin typeface="Segoe UI"/>
+              </a:rPr>
+              <a:t>Bus SA et al. Diabetes Care. 2013;36(12):4109–16.</a:t>
+            </a:r>
+          </a:p>
+        </p:txBody>
+      </p:sp>
+      <p:sp>
+        <p:nvSpPr>
+          <p:cNvPr id="17" name="TextBox 16"/>
+          <p:cNvSpPr txBox="1"/>
+          <p:nvPr/>
+        </p:nvSpPr>
+        <p:spPr>
+          <a:xfrm>
+            <a:off x="634984" y="3860053"/>
+            <a:ext cx="279393" cy="190495"/>
+          </a:xfrm>
+          <a:prstGeom prst="rect">
+            <a:avLst/>
+          </a:prstGeom>
+          <a:noFill/>
+        </p:spPr>
+        <p:txBody>
+          <a:bodyPr wrap="square" anchor="t" lIns="0" rIns="0" tIns="0" bIns="0">
+            <a:spAutoFit/>
+          </a:bodyPr>
+          <a:lstStyle/>
+          <a:p>
+            <a:pPr algn="r">
+              <a:lnSpc>
+                <a:spcPct val="125000"/>
+              </a:lnSpc>
+            </a:pPr>
+            <a:r>
+              <a:rPr sz="1200" b="1">
+                <a:solidFill>
+                  <a:srgbClr val="52BDEC"/>
+                </a:solidFill>
+                <a:latin typeface="Consolas"/>
+              </a:rPr>
+              <a:t>13</a:t>
+            </a:r>
+          </a:p>
+        </p:txBody>
+      </p:sp>
+      <p:sp>
+        <p:nvSpPr>
+          <p:cNvPr id="18" name="TextBox 17"/>
+          <p:cNvSpPr txBox="1"/>
+          <p:nvPr/>
+        </p:nvSpPr>
+        <p:spPr>
+          <a:xfrm>
+            <a:off x="965175" y="3860053"/>
+            <a:ext cx="5054346" cy="296217"/>
+          </a:xfrm>
+          <a:prstGeom prst="rect">
+            <a:avLst/>
+          </a:prstGeom>
+          <a:noFill/>
+        </p:spPr>
+        <p:txBody>
+          <a:bodyPr wrap="square" anchor="t" lIns="0" rIns="0" tIns="0" bIns="0">
+            <a:spAutoFit/>
+          </a:bodyPr>
+          <a:lstStyle/>
+          <a:p>
+            <a:pPr algn="l">
+              <a:lnSpc>
+                <a:spcPct val="132000"/>
+              </a:lnSpc>
+            </a:pPr>
+            <a:r>
+              <a:rPr sz="1200" b="0">
+                <a:solidFill>
+                  <a:srgbClr val="8FB6D0"/>
+                </a:solidFill>
+                <a:latin typeface="Segoe UI"/>
+              </a:rPr>
+              <a:t>Waaijman R et al. Diabetes Care. 2013;36(6):1613–8.</a:t>
+            </a:r>
+          </a:p>
+        </p:txBody>
+      </p:sp>
+      <p:sp>
+        <p:nvSpPr>
+          <p:cNvPr id="19" name="TextBox 18"/>
+          <p:cNvSpPr txBox="1"/>
+          <p:nvPr/>
+        </p:nvSpPr>
+        <p:spPr>
+          <a:xfrm>
+            <a:off x="6171918" y="1854153"/>
+            <a:ext cx="279393" cy="190495"/>
+          </a:xfrm>
+          <a:prstGeom prst="rect">
+            <a:avLst/>
+          </a:prstGeom>
+          <a:noFill/>
+        </p:spPr>
+        <p:txBody>
+          <a:bodyPr wrap="square" anchor="t" lIns="0" rIns="0" tIns="0" bIns="0">
+            <a:spAutoFit/>
+          </a:bodyPr>
+          <a:lstStyle/>
+          <a:p>
+            <a:pPr algn="r">
+              <a:lnSpc>
+                <a:spcPct val="125000"/>
+              </a:lnSpc>
+            </a:pPr>
+            <a:r>
+              <a:rPr sz="1200" b="1">
+                <a:solidFill>
+                  <a:srgbClr val="52BDEC"/>
+                </a:solidFill>
+                <a:latin typeface="Consolas"/>
+              </a:rPr>
+              <a:t>14</a:t>
+            </a:r>
+          </a:p>
+        </p:txBody>
+      </p:sp>
+      <p:sp>
+        <p:nvSpPr>
+          <p:cNvPr id="20" name="TextBox 19"/>
+          <p:cNvSpPr txBox="1"/>
+          <p:nvPr/>
+        </p:nvSpPr>
+        <p:spPr>
+          <a:xfrm>
+            <a:off x="6502110" y="1854153"/>
+            <a:ext cx="5054346" cy="296217"/>
+          </a:xfrm>
+          <a:prstGeom prst="rect">
+            <a:avLst/>
+          </a:prstGeom>
+          <a:noFill/>
+        </p:spPr>
+        <p:txBody>
+          <a:bodyPr wrap="square" anchor="t" lIns="0" rIns="0" tIns="0" bIns="0">
+            <a:spAutoFit/>
+          </a:bodyPr>
+          <a:lstStyle/>
+          <a:p>
+            <a:pPr algn="l">
+              <a:lnSpc>
+                <a:spcPct val="132000"/>
+              </a:lnSpc>
+            </a:pPr>
+            <a:r>
+              <a:rPr sz="1200" b="0">
+                <a:solidFill>
+                  <a:srgbClr val="8FB6D0"/>
+                </a:solidFill>
+                <a:latin typeface="Segoe UI"/>
+              </a:rPr>
+              <a:t>van Netten JJ et al. Clin Biomech. 2018;53:86–92.</a:t>
+            </a:r>
+          </a:p>
+        </p:txBody>
+      </p:sp>
+      <p:sp>
+        <p:nvSpPr>
+          <p:cNvPr id="21" name="TextBox 20"/>
+          <p:cNvSpPr txBox="1"/>
+          <p:nvPr/>
+        </p:nvSpPr>
+        <p:spPr>
+          <a:xfrm>
+            <a:off x="6171918" y="2188470"/>
+            <a:ext cx="279393" cy="190495"/>
+          </a:xfrm>
+          <a:prstGeom prst="rect">
+            <a:avLst/>
+          </a:prstGeom>
+          <a:noFill/>
+        </p:spPr>
+        <p:txBody>
+          <a:bodyPr wrap="square" anchor="t" lIns="0" rIns="0" tIns="0" bIns="0">
+            <a:spAutoFit/>
+          </a:bodyPr>
+          <a:lstStyle/>
+          <a:p>
+            <a:pPr algn="r">
+              <a:lnSpc>
+                <a:spcPct val="125000"/>
+              </a:lnSpc>
+            </a:pPr>
+            <a:r>
+              <a:rPr sz="1200" b="1">
+                <a:solidFill>
+                  <a:srgbClr val="52BDEC"/>
+                </a:solidFill>
+                <a:latin typeface="Consolas"/>
+              </a:rPr>
+              <a:t>16</a:t>
+            </a:r>
+          </a:p>
+        </p:txBody>
+      </p:sp>
+      <p:sp>
+        <p:nvSpPr>
+          <p:cNvPr id="22" name="TextBox 21"/>
+          <p:cNvSpPr txBox="1"/>
+          <p:nvPr/>
+        </p:nvSpPr>
+        <p:spPr>
+          <a:xfrm>
+            <a:off x="6502110" y="2188470"/>
+            <a:ext cx="5054346" cy="296217"/>
+          </a:xfrm>
+          <a:prstGeom prst="rect">
+            <a:avLst/>
+          </a:prstGeom>
+          <a:noFill/>
+        </p:spPr>
+        <p:txBody>
+          <a:bodyPr wrap="square" anchor="t" lIns="0" rIns="0" tIns="0" bIns="0">
+            <a:spAutoFit/>
+          </a:bodyPr>
+          <a:lstStyle/>
+          <a:p>
+            <a:pPr algn="l">
+              <a:lnSpc>
+                <a:spcPct val="132000"/>
+              </a:lnSpc>
+            </a:pPr>
+            <a:r>
+              <a:rPr sz="1200" b="0">
+                <a:solidFill>
+                  <a:srgbClr val="8FB6D0"/>
+                </a:solidFill>
+                <a:latin typeface="Segoe UI"/>
+              </a:rPr>
+              <a:t>Hulshof CM et al. Diabet Med. 2025;42:e70099.</a:t>
+            </a:r>
+          </a:p>
+        </p:txBody>
+      </p:sp>
+      <p:sp>
+        <p:nvSpPr>
+          <p:cNvPr id="23" name="TextBox 22"/>
+          <p:cNvSpPr txBox="1"/>
+          <p:nvPr/>
+        </p:nvSpPr>
+        <p:spPr>
+          <a:xfrm>
+            <a:off x="6171918" y="2522786"/>
+            <a:ext cx="279393" cy="190495"/>
+          </a:xfrm>
+          <a:prstGeom prst="rect">
+            <a:avLst/>
+          </a:prstGeom>
+          <a:noFill/>
+        </p:spPr>
+        <p:txBody>
+          <a:bodyPr wrap="square" anchor="t" lIns="0" rIns="0" tIns="0" bIns="0">
+            <a:spAutoFit/>
+          </a:bodyPr>
+          <a:lstStyle/>
+          <a:p>
+            <a:pPr algn="r">
+              <a:lnSpc>
+                <a:spcPct val="125000"/>
+              </a:lnSpc>
+            </a:pPr>
+            <a:r>
+              <a:rPr sz="1200" b="1">
+                <a:solidFill>
+                  <a:srgbClr val="52BDEC"/>
+                </a:solidFill>
+                <a:latin typeface="Consolas"/>
+              </a:rPr>
+              <a:t>17</a:t>
+            </a:r>
+          </a:p>
+        </p:txBody>
+      </p:sp>
+      <p:sp>
+        <p:nvSpPr>
+          <p:cNvPr id="24" name="TextBox 23"/>
+          <p:cNvSpPr txBox="1"/>
+          <p:nvPr/>
+        </p:nvSpPr>
+        <p:spPr>
+          <a:xfrm>
+            <a:off x="6502110" y="2522786"/>
+            <a:ext cx="5054346" cy="296217"/>
+          </a:xfrm>
+          <a:prstGeom prst="rect">
+            <a:avLst/>
+          </a:prstGeom>
+          <a:noFill/>
+        </p:spPr>
+        <p:txBody>
+          <a:bodyPr wrap="square" anchor="t" lIns="0" rIns="0" tIns="0" bIns="0">
+            <a:spAutoFit/>
+          </a:bodyPr>
+          <a:lstStyle/>
+          <a:p>
+            <a:pPr algn="l">
+              <a:lnSpc>
+                <a:spcPct val="132000"/>
+              </a:lnSpc>
+            </a:pPr>
+            <a:r>
+              <a:rPr sz="1200" b="0">
+                <a:solidFill>
+                  <a:srgbClr val="8FB6D0"/>
+                </a:solidFill>
+                <a:latin typeface="Segoe UI"/>
+              </a:rPr>
+              <a:t>Waaijman R et al. Diabetes Care. 2014;37(6):1697–705.</a:t>
+            </a:r>
+          </a:p>
+        </p:txBody>
+      </p:sp>
+      <p:sp>
+        <p:nvSpPr>
+          <p:cNvPr id="25" name="TextBox 24"/>
+          <p:cNvSpPr txBox="1"/>
+          <p:nvPr/>
+        </p:nvSpPr>
+        <p:spPr>
+          <a:xfrm>
+            <a:off x="6171918" y="2857103"/>
+            <a:ext cx="279393" cy="190495"/>
+          </a:xfrm>
+          <a:prstGeom prst="rect">
+            <a:avLst/>
+          </a:prstGeom>
+          <a:noFill/>
+        </p:spPr>
+        <p:txBody>
+          <a:bodyPr wrap="square" anchor="t" lIns="0" rIns="0" tIns="0" bIns="0">
+            <a:spAutoFit/>
+          </a:bodyPr>
+          <a:lstStyle/>
+          <a:p>
+            <a:pPr algn="r">
+              <a:lnSpc>
+                <a:spcPct val="125000"/>
+              </a:lnSpc>
+            </a:pPr>
+            <a:r>
+              <a:rPr sz="1200" b="1">
+                <a:solidFill>
+                  <a:srgbClr val="52BDEC"/>
+                </a:solidFill>
+                <a:latin typeface="Consolas"/>
+              </a:rPr>
+              <a:t>18</a:t>
+            </a:r>
+          </a:p>
+        </p:txBody>
+      </p:sp>
+      <p:sp>
+        <p:nvSpPr>
+          <p:cNvPr id="26" name="TextBox 25"/>
+          <p:cNvSpPr txBox="1"/>
+          <p:nvPr/>
+        </p:nvSpPr>
+        <p:spPr>
+          <a:xfrm>
+            <a:off x="6502110" y="2857103"/>
+            <a:ext cx="5054346" cy="296217"/>
+          </a:xfrm>
+          <a:prstGeom prst="rect">
+            <a:avLst/>
+          </a:prstGeom>
+          <a:noFill/>
+        </p:spPr>
+        <p:txBody>
+          <a:bodyPr wrap="square" anchor="t" lIns="0" rIns="0" tIns="0" bIns="0">
+            <a:spAutoFit/>
+          </a:bodyPr>
+          <a:lstStyle/>
+          <a:p>
+            <a:pPr algn="l">
+              <a:lnSpc>
+                <a:spcPct val="132000"/>
+              </a:lnSpc>
+            </a:pPr>
+            <a:r>
+              <a:rPr sz="1200" b="0">
+                <a:solidFill>
+                  <a:srgbClr val="8FB6D0"/>
+                </a:solidFill>
+                <a:latin typeface="Segoe UI"/>
+              </a:rPr>
+              <a:t>Lutjeboer T et al. J Rehabil Med. 2018;50(10):920–6.</a:t>
+            </a:r>
+          </a:p>
+        </p:txBody>
+      </p:sp>
+      <p:sp>
+        <p:nvSpPr>
+          <p:cNvPr id="27" name="TextBox 26"/>
+          <p:cNvSpPr txBox="1"/>
+          <p:nvPr/>
+        </p:nvSpPr>
+        <p:spPr>
+          <a:xfrm>
+            <a:off x="6171918" y="3191420"/>
+            <a:ext cx="279393" cy="190495"/>
+          </a:xfrm>
+          <a:prstGeom prst="rect">
+            <a:avLst/>
+          </a:prstGeom>
+          <a:noFill/>
+        </p:spPr>
+        <p:txBody>
+          <a:bodyPr wrap="square" anchor="t" lIns="0" rIns="0" tIns="0" bIns="0">
+            <a:spAutoFit/>
+          </a:bodyPr>
+          <a:lstStyle/>
+          <a:p>
+            <a:pPr algn="r">
+              <a:lnSpc>
+                <a:spcPct val="125000"/>
+              </a:lnSpc>
+            </a:pPr>
+            <a:r>
+              <a:rPr sz="1200" b="1">
+                <a:solidFill>
+                  <a:srgbClr val="52BDEC"/>
+                </a:solidFill>
+                <a:latin typeface="Consolas"/>
+              </a:rPr>
+              <a:t>20</a:t>
+            </a:r>
+          </a:p>
+        </p:txBody>
+      </p:sp>
+      <p:sp>
+        <p:nvSpPr>
+          <p:cNvPr id="28" name="TextBox 27"/>
+          <p:cNvSpPr txBox="1"/>
+          <p:nvPr/>
+        </p:nvSpPr>
+        <p:spPr>
+          <a:xfrm>
+            <a:off x="6502110" y="3191420"/>
+            <a:ext cx="5054346" cy="296217"/>
+          </a:xfrm>
+          <a:prstGeom prst="rect">
+            <a:avLst/>
+          </a:prstGeom>
+          <a:noFill/>
+        </p:spPr>
+        <p:txBody>
+          <a:bodyPr wrap="square" anchor="t" lIns="0" rIns="0" tIns="0" bIns="0">
+            <a:spAutoFit/>
+          </a:bodyPr>
+          <a:lstStyle/>
+          <a:p>
+            <a:pPr algn="l">
+              <a:lnSpc>
+                <a:spcPct val="132000"/>
+              </a:lnSpc>
+            </a:pPr>
+            <a:r>
+              <a:rPr sz="1200" b="0">
+                <a:solidFill>
+                  <a:srgbClr val="8FB6D0"/>
+                </a:solidFill>
+                <a:latin typeface="Segoe UI"/>
+              </a:rPr>
+              <a:t>Morbach S et al. Diabetes Metab Res Rev. 2016;32(Suppl 1):318–25.</a:t>
+            </a:r>
+          </a:p>
+        </p:txBody>
+      </p:sp>
+      <p:sp>
+        <p:nvSpPr>
+          <p:cNvPr id="29" name="TextBox 28"/>
+          <p:cNvSpPr txBox="1"/>
+          <p:nvPr/>
+        </p:nvSpPr>
+        <p:spPr>
+          <a:xfrm>
+            <a:off x="6171918" y="3525736"/>
+            <a:ext cx="279393" cy="190495"/>
+          </a:xfrm>
+          <a:prstGeom prst="rect">
+            <a:avLst/>
+          </a:prstGeom>
+          <a:noFill/>
+        </p:spPr>
+        <p:txBody>
+          <a:bodyPr wrap="square" anchor="t" lIns="0" rIns="0" tIns="0" bIns="0">
+            <a:spAutoFit/>
+          </a:bodyPr>
+          <a:lstStyle/>
+          <a:p>
+            <a:pPr algn="r">
+              <a:lnSpc>
+                <a:spcPct val="125000"/>
+              </a:lnSpc>
+            </a:pPr>
+            <a:r>
+              <a:rPr sz="1200" b="1">
+                <a:solidFill>
+                  <a:srgbClr val="52BDEC"/>
+                </a:solidFill>
+                <a:latin typeface="Consolas"/>
+              </a:rPr>
+              <a:t>21</a:t>
+            </a:r>
+          </a:p>
+        </p:txBody>
+      </p:sp>
+      <p:sp>
+        <p:nvSpPr>
+          <p:cNvPr id="30" name="TextBox 29"/>
+          <p:cNvSpPr txBox="1"/>
+          <p:nvPr/>
+        </p:nvSpPr>
+        <p:spPr>
+          <a:xfrm>
+            <a:off x="6502110" y="3525736"/>
+            <a:ext cx="5054346" cy="296217"/>
+          </a:xfrm>
+          <a:prstGeom prst="rect">
+            <a:avLst/>
+          </a:prstGeom>
+          <a:noFill/>
+        </p:spPr>
+        <p:txBody>
+          <a:bodyPr wrap="square" anchor="t" lIns="0" rIns="0" tIns="0" bIns="0">
+            <a:spAutoFit/>
+          </a:bodyPr>
+          <a:lstStyle/>
+          <a:p>
+            <a:pPr algn="l">
+              <a:lnSpc>
+                <a:spcPct val="132000"/>
+              </a:lnSpc>
+            </a:pPr>
+            <a:r>
+              <a:rPr sz="1200" b="0">
+                <a:solidFill>
+                  <a:srgbClr val="8FB6D0"/>
+                </a:solidFill>
+                <a:latin typeface="Segoe UI"/>
+              </a:rPr>
+              <a:t>Chan A-W et al. BMJ. 2025;389:e081477.</a:t>
+            </a:r>
+          </a:p>
+        </p:txBody>
+      </p:sp>
+      <p:sp>
+        <p:nvSpPr>
+          <p:cNvPr id="31" name="TextBox 30"/>
+          <p:cNvSpPr txBox="1"/>
+          <p:nvPr/>
+        </p:nvSpPr>
+        <p:spPr>
+          <a:xfrm>
+            <a:off x="6171918" y="3860053"/>
+            <a:ext cx="279393" cy="190495"/>
+          </a:xfrm>
+          <a:prstGeom prst="rect">
+            <a:avLst/>
+          </a:prstGeom>
+          <a:noFill/>
+        </p:spPr>
+        <p:txBody>
+          <a:bodyPr wrap="square" anchor="t" lIns="0" rIns="0" tIns="0" bIns="0">
+            <a:spAutoFit/>
+          </a:bodyPr>
+          <a:lstStyle/>
+          <a:p>
+            <a:pPr algn="r">
+              <a:lnSpc>
+                <a:spcPct val="125000"/>
+              </a:lnSpc>
+            </a:pPr>
+            <a:r>
+              <a:rPr sz="1200" b="1">
+                <a:solidFill>
+                  <a:srgbClr val="52BDEC"/>
+                </a:solidFill>
+                <a:latin typeface="Consolas"/>
+              </a:rPr>
+              <a:t>27</a:t>
+            </a:r>
+          </a:p>
+        </p:txBody>
+      </p:sp>
+      <p:sp>
+        <p:nvSpPr>
+          <p:cNvPr id="32" name="TextBox 31"/>
+          <p:cNvSpPr txBox="1"/>
+          <p:nvPr/>
+        </p:nvSpPr>
+        <p:spPr>
+          <a:xfrm>
+            <a:off x="6502110" y="3860053"/>
+            <a:ext cx="5054346" cy="296217"/>
+          </a:xfrm>
+          <a:prstGeom prst="rect">
+            <a:avLst/>
+          </a:prstGeom>
+          <a:noFill/>
+        </p:spPr>
+        <p:txBody>
+          <a:bodyPr wrap="square" anchor="t" lIns="0" rIns="0" tIns="0" bIns="0">
+            <a:spAutoFit/>
+          </a:bodyPr>
+          <a:lstStyle/>
+          <a:p>
+            <a:pPr algn="l">
+              <a:lnSpc>
+                <a:spcPct val="132000"/>
+              </a:lnSpc>
+            </a:pPr>
+            <a:r>
+              <a:rPr sz="1200" b="0">
+                <a:solidFill>
+                  <a:srgbClr val="8FB6D0"/>
+                </a:solidFill>
+                <a:latin typeface="Segoe UI"/>
+              </a:rPr>
+              <a:t>Zwaferink JBJ et al. Sensors. 2024;24(6):1795.</a:t>
+            </a:r>
+          </a:p>
+        </p:txBody>
+      </p:sp>
+      <p:sp>
+        <p:nvSpPr>
+          <p:cNvPr id="33" name="TextBox 32"/>
+          <p:cNvSpPr txBox="1"/>
+          <p:nvPr/>
+        </p:nvSpPr>
+        <p:spPr>
+          <a:xfrm>
+            <a:off x="634984" y="6387940"/>
+            <a:ext cx="9524761" cy="190495"/>
+          </a:xfrm>
+          <a:prstGeom prst="rect">
+            <a:avLst/>
+          </a:prstGeom>
+          <a:noFill/>
+        </p:spPr>
+        <p:txBody>
+          <a:bodyPr wrap="square" anchor="t" lIns="0" rIns="0" tIns="0" bIns="0">
+            <a:spAutoFit/>
+          </a:bodyPr>
+          <a:lstStyle/>
+          <a:p>
+            <a:pPr algn="l">
+              <a:lnSpc>
+                <a:spcPct val="125000"/>
+              </a:lnSpc>
+            </a:pPr>
+            <a:r>
+              <a:rPr sz="1100" b="0">
+                <a:solidFill>
+                  <a:srgbClr val="8FB6D0"/>
+                </a:solidFill>
+                <a:latin typeface="Consolas"/>
+              </a:rPr>
+              <a:t>De nummering volgt die van het protocolmanuscript.</a:t>
+            </a:r>
+          </a:p>
+        </p:txBody>
+      </p:sp>
+      <p:sp>
+        <p:nvSpPr>
+          <p:cNvPr id="34" name="TextBox 33"/>
+          <p:cNvSpPr txBox="1"/>
+          <p:nvPr/>
+        </p:nvSpPr>
+        <p:spPr>
+          <a:xfrm>
+            <a:off x="10540736" y="6387940"/>
+            <a:ext cx="1015974" cy="177795"/>
+          </a:xfrm>
+          <a:prstGeom prst="rect">
+            <a:avLst/>
+          </a:prstGeom>
+          <a:noFill/>
+        </p:spPr>
+        <p:txBody>
+          <a:bodyPr wrap="square" anchor="t" lIns="0" rIns="0" tIns="0" bIns="0">
+            <a:spAutoFit/>
+          </a:bodyPr>
+          <a:lstStyle/>
+          <a:p>
+            <a:pPr algn="r">
+              <a:lnSpc>
+                <a:spcPct val="125000"/>
+              </a:lnSpc>
+            </a:pPr>
+            <a:r>
+              <a:rPr sz="1050" b="0">
+                <a:solidFill>
+                  <a:srgbClr val="8FB6D0"/>
+                </a:solidFill>
+                <a:latin typeface="Consolas"/>
+              </a:rPr>
+              <a:t>27 / 27</a:t>
+            </a:r>
+          </a:p>
+        </p:txBody>
+      </p:sp>
+      <p:pic>
+        <p:nvPicPr>
+          <p:cNvPr id="35" name="merk" descr="merk.png"/>
+          <p:cNvPicPr>
+            <a:picLocks noChangeAspect="1"/>
+          </p:cNvPicPr>
+          <p:nvPr/>
+        </p:nvPicPr>
+        <p:blipFill>
+          <a:blip r:embed="rId2"/>
+          <a:stretch>
+            <a:fillRect/>
+          </a:stretch>
+        </p:blipFill>
+        <p:spPr>
+          <a:xfrm>
+            <a:off x="11094166" y="368290"/>
+            <a:ext cx="417101" cy="482587"/>
+          </a:xfrm>
+          <a:prstGeom prst="rect">
+            <a:avLst/>
+          </a:prstGeom>
+        </p:spPr>
+      </p:pic>
+    </p:spTree>
+  </p:cSld>
+  <p:clrMapOvr>
+    <a:masterClrMapping/>
+  </p:clrMapOvr>
+  <p:transition xmlns:p14="http://schemas.microsoft.com/office/powerpoint/2010/main" spd="slow" p14:dur="900">
+    <p:fade/>
+  </p:transition>
+</p:sld>
+</file>
+
 <file path=ppt/slides/slide3.xml><?xml version="1.0" encoding="utf-8"?>
 <p:sld xmlns:a="http://schemas.openxmlformats.org/drawingml/2006/main" xmlns:p="http://schemas.openxmlformats.org/presentationml/2006/main" xmlns:r="http://schemas.openxmlformats.org/officeDocument/2006/relationships">
   <p:cSld>
@@ -64976,7 +66801,7 @@
                 </a:solidFill>
                 <a:latin typeface="Consolas"/>
               </a:rPr>
-              <a:t>03 / 26</a:t>
+              <a:t>03 / 27</a:t>
             </a:r>
           </a:p>
         </p:txBody>
@@ -65005,6 +66830,45 @@
           </a:prstGeom>
         </p:spPr>
       </p:pic>
+      <p:sp>
+        <p:nvSpPr>
+          <p:cNvPr id="26" name="TextBox 25"/>
+          <p:cNvSpPr txBox="1"/>
+          <p:nvPr/>
+        </p:nvSpPr>
+        <p:spPr>
+          <a:xfrm>
+            <a:off x="634984" y="6629234"/>
+            <a:ext cx="10921726" cy="177795"/>
+          </a:xfrm>
+          <a:prstGeom prst="rect">
+            <a:avLst/>
+          </a:prstGeom>
+          <a:noFill/>
+        </p:spPr>
+        <p:txBody>
+          <a:bodyPr wrap="square" anchor="t" lIns="0" rIns="0" tIns="0" bIns="0">
+            <a:spAutoFit/>
+          </a:bodyPr>
+          <a:lstStyle/>
+          <a:p>
+            <a:pPr algn="l">
+              <a:lnSpc>
+                <a:spcPct val="125000"/>
+              </a:lnSpc>
+            </a:pPr>
+            <a:r>
+              <a:rPr sz="1000" b="0">
+                <a:solidFill>
+                  <a:srgbClr val="8FB6D0"/>
+                </a:solidFill>
+                <a:latin typeface="Consolas"/>
+              </a:rPr>
+              <a:t>Bron  20 · Morbach 2016</a:t>
+            </a:r>
+          </a:p>
+        </p:txBody>
+      </p:sp>
     </p:spTree>
   </p:cSld>
   <p:clrMapOvr>
@@ -65930,7 +67794,7 @@
                 </a:solidFill>
                 <a:latin typeface="Consolas"/>
               </a:rPr>
-              <a:t>04 / 26</a:t>
+              <a:t>04 / 27</a:t>
             </a:r>
           </a:p>
         </p:txBody>
@@ -65959,6 +67823,45 @@
           </a:prstGeom>
         </p:spPr>
       </p:pic>
+      <p:sp>
+        <p:nvSpPr>
+          <p:cNvPr id="25" name="TextBox 24"/>
+          <p:cNvSpPr txBox="1"/>
+          <p:nvPr/>
+        </p:nvSpPr>
+        <p:spPr>
+          <a:xfrm>
+            <a:off x="634984" y="6629234"/>
+            <a:ext cx="10921726" cy="177795"/>
+          </a:xfrm>
+          <a:prstGeom prst="rect">
+            <a:avLst/>
+          </a:prstGeom>
+          <a:noFill/>
+        </p:spPr>
+        <p:txBody>
+          <a:bodyPr wrap="square" anchor="t" lIns="0" rIns="0" tIns="0" bIns="0">
+            <a:spAutoFit/>
+          </a:bodyPr>
+          <a:lstStyle/>
+          <a:p>
+            <a:pPr algn="l">
+              <a:lnSpc>
+                <a:spcPct val="125000"/>
+              </a:lnSpc>
+            </a:pPr>
+            <a:r>
+              <a:rPr sz="1000" b="0">
+                <a:solidFill>
+                  <a:srgbClr val="8FB6D0"/>
+                </a:solidFill>
+                <a:latin typeface="Consolas"/>
+              </a:rPr>
+              <a:t>Bron  20 · Morbach 2016</a:t>
+            </a:r>
+          </a:p>
+        </p:txBody>
+      </p:sp>
     </p:spTree>
   </p:cSld>
   <p:clrMapOvr>
@@ -66884,7 +68787,7 @@
                 </a:solidFill>
                 <a:latin typeface="Consolas"/>
               </a:rPr>
-              <a:t>05 / 26</a:t>
+              <a:t>05 / 27</a:t>
             </a:r>
           </a:p>
         </p:txBody>
@@ -66913,6 +68816,45 @@
           </a:prstGeom>
         </p:spPr>
       </p:pic>
+      <p:sp>
+        <p:nvSpPr>
+          <p:cNvPr id="25" name="TextBox 24"/>
+          <p:cNvSpPr txBox="1"/>
+          <p:nvPr/>
+        </p:nvSpPr>
+        <p:spPr>
+          <a:xfrm>
+            <a:off x="634984" y="6629234"/>
+            <a:ext cx="10921726" cy="177795"/>
+          </a:xfrm>
+          <a:prstGeom prst="rect">
+            <a:avLst/>
+          </a:prstGeom>
+          <a:noFill/>
+        </p:spPr>
+        <p:txBody>
+          <a:bodyPr wrap="square" anchor="t" lIns="0" rIns="0" tIns="0" bIns="0">
+            <a:spAutoFit/>
+          </a:bodyPr>
+          <a:lstStyle/>
+          <a:p>
+            <a:pPr algn="l">
+              <a:lnSpc>
+                <a:spcPct val="125000"/>
+              </a:lnSpc>
+            </a:pPr>
+            <a:r>
+              <a:rPr sz="1000" b="0">
+                <a:solidFill>
+                  <a:srgbClr val="8FB6D0"/>
+                </a:solidFill>
+                <a:latin typeface="Consolas"/>
+              </a:rPr>
+              <a:t>Bron  9 · Bus 2013, DIAFOS   |   13 · Waaijman 2013</a:t>
+            </a:r>
+          </a:p>
+        </p:txBody>
+      </p:sp>
     </p:spTree>
   </p:cSld>
   <p:clrMapOvr>
@@ -67180,7 +69122,7 @@
                 </a:solidFill>
                 <a:latin typeface="Consolas"/>
               </a:rPr>
-              <a:t>06 / 26</a:t>
+              <a:t>06 / 27</a:t>
             </a:r>
           </a:p>
         </p:txBody>
@@ -67900,7 +69842,7 @@
                 </a:solidFill>
                 <a:latin typeface="Consolas"/>
               </a:rPr>
-              <a:t>07 / 26</a:t>
+              <a:t>07 / 27</a:t>
             </a:r>
           </a:p>
         </p:txBody>
@@ -67929,6 +69871,45 @@
           </a:prstGeom>
         </p:spPr>
       </p:pic>
+      <p:sp>
+        <p:nvSpPr>
+          <p:cNvPr id="19" name="TextBox 18"/>
+          <p:cNvSpPr txBox="1"/>
+          <p:nvPr/>
+        </p:nvSpPr>
+        <p:spPr>
+          <a:xfrm>
+            <a:off x="634984" y="6629234"/>
+            <a:ext cx="10921726" cy="177795"/>
+          </a:xfrm>
+          <a:prstGeom prst="rect">
+            <a:avLst/>
+          </a:prstGeom>
+          <a:noFill/>
+        </p:spPr>
+        <p:txBody>
+          <a:bodyPr wrap="square" anchor="t" lIns="0" rIns="0" tIns="0" bIns="0">
+            <a:spAutoFit/>
+          </a:bodyPr>
+          <a:lstStyle/>
+          <a:p>
+            <a:pPr algn="l">
+              <a:lnSpc>
+                <a:spcPct val="125000"/>
+              </a:lnSpc>
+            </a:pPr>
+            <a:r>
+              <a:rPr sz="1000" b="0">
+                <a:solidFill>
+                  <a:srgbClr val="8FB6D0"/>
+                </a:solidFill>
+                <a:latin typeface="Consolas"/>
+              </a:rPr>
+              <a:t>Bron  1 · Armstrong 2017</a:t>
+            </a:r>
+          </a:p>
+        </p:txBody>
+      </p:sp>
     </p:spTree>
   </p:cSld>
   <p:clrMapOvr>
@@ -69434,7 +71415,7 @@
                 </a:solidFill>
                 <a:latin typeface="Consolas"/>
               </a:rPr>
-              <a:t>09 / 26</a:t>
+              <a:t>09 / 27</a:t>
             </a:r>
           </a:p>
         </p:txBody>
@@ -69463,6 +71444,45 @@
           </a:prstGeom>
         </p:spPr>
       </p:pic>
+      <p:sp>
+        <p:nvSpPr>
+          <p:cNvPr id="33" name="TextBox 32"/>
+          <p:cNvSpPr txBox="1"/>
+          <p:nvPr/>
+        </p:nvSpPr>
+        <p:spPr>
+          <a:xfrm>
+            <a:off x="634984" y="6629234"/>
+            <a:ext cx="10921726" cy="177795"/>
+          </a:xfrm>
+          <a:prstGeom prst="rect">
+            <a:avLst/>
+          </a:prstGeom>
+          <a:noFill/>
+        </p:spPr>
+        <p:txBody>
+          <a:bodyPr wrap="square" anchor="t" lIns="0" rIns="0" tIns="0" bIns="0">
+            <a:spAutoFit/>
+          </a:bodyPr>
+          <a:lstStyle/>
+          <a:p>
+            <a:pPr algn="l">
+              <a:lnSpc>
+                <a:spcPct val="125000"/>
+              </a:lnSpc>
+            </a:pPr>
+            <a:r>
+              <a:rPr sz="1000" b="0">
+                <a:solidFill>
+                  <a:srgbClr val="8FB6D0"/>
+                </a:solidFill>
+                <a:latin typeface="Consolas"/>
+              </a:rPr>
+              <a:t>Bron  9 · Bus 2013, DIAFOS</a:t>
+            </a:r>
+          </a:p>
+        </p:txBody>
+      </p:sp>
     </p:spTree>
   </p:cSld>
   <p:clrMapOvr>
